--- a/ゲーム科1年/00_前期/ゲームプログラミングⅠ/11_当たり判定の導入.pptx
+++ b/ゲーム科1年/00_前期/ゲームプログラミングⅠ/11_当たり判定の導入.pptx
@@ -263,7 +263,7 @@
           <a:p>
             <a:fld id="{E9CC885B-4903-4D54-9A93-00025F12DED9}" type="datetimeFigureOut">
               <a:rPr kumimoji="1" lang="ja-JP" altLang="en-US" smtClean="0"/>
-              <a:t>2024/12/4</a:t>
+              <a:t>2025/3/3</a:t>
             </a:fld>
             <a:endParaRPr kumimoji="1" lang="ja-JP" altLang="en-US"/>
           </a:p>
@@ -493,7 +493,7 @@
           <a:p>
             <a:fld id="{E9CC885B-4903-4D54-9A93-00025F12DED9}" type="datetimeFigureOut">
               <a:rPr kumimoji="1" lang="ja-JP" altLang="en-US" smtClean="0"/>
-              <a:t>2024/12/4</a:t>
+              <a:t>2025/3/3</a:t>
             </a:fld>
             <a:endParaRPr kumimoji="1" lang="ja-JP" altLang="en-US"/>
           </a:p>
@@ -733,7 +733,7 @@
           <a:p>
             <a:fld id="{E9CC885B-4903-4D54-9A93-00025F12DED9}" type="datetimeFigureOut">
               <a:rPr kumimoji="1" lang="ja-JP" altLang="en-US" smtClean="0"/>
-              <a:t>2024/12/4</a:t>
+              <a:t>2025/3/3</a:t>
             </a:fld>
             <a:endParaRPr kumimoji="1" lang="ja-JP" altLang="en-US"/>
           </a:p>
@@ -963,7 +963,7 @@
           <a:p>
             <a:fld id="{E9CC885B-4903-4D54-9A93-00025F12DED9}" type="datetimeFigureOut">
               <a:rPr kumimoji="1" lang="ja-JP" altLang="en-US" smtClean="0"/>
-              <a:t>2024/12/4</a:t>
+              <a:t>2025/3/3</a:t>
             </a:fld>
             <a:endParaRPr kumimoji="1" lang="ja-JP" altLang="en-US"/>
           </a:p>
@@ -1238,7 +1238,7 @@
           <a:p>
             <a:fld id="{E9CC885B-4903-4D54-9A93-00025F12DED9}" type="datetimeFigureOut">
               <a:rPr kumimoji="1" lang="ja-JP" altLang="en-US" smtClean="0"/>
-              <a:t>2024/12/4</a:t>
+              <a:t>2025/3/3</a:t>
             </a:fld>
             <a:endParaRPr kumimoji="1" lang="ja-JP" altLang="en-US"/>
           </a:p>
@@ -1567,7 +1567,7 @@
           <a:p>
             <a:fld id="{E9CC885B-4903-4D54-9A93-00025F12DED9}" type="datetimeFigureOut">
               <a:rPr kumimoji="1" lang="ja-JP" altLang="en-US" smtClean="0"/>
-              <a:t>2024/12/4</a:t>
+              <a:t>2025/3/3</a:t>
             </a:fld>
             <a:endParaRPr kumimoji="1" lang="ja-JP" altLang="en-US"/>
           </a:p>
@@ -2043,7 +2043,7 @@
           <a:p>
             <a:fld id="{E9CC885B-4903-4D54-9A93-00025F12DED9}" type="datetimeFigureOut">
               <a:rPr kumimoji="1" lang="ja-JP" altLang="en-US" smtClean="0"/>
-              <a:t>2024/12/4</a:t>
+              <a:t>2025/3/3</a:t>
             </a:fld>
             <a:endParaRPr kumimoji="1" lang="ja-JP" altLang="en-US"/>
           </a:p>
@@ -2184,7 +2184,7 @@
           <a:p>
             <a:fld id="{E9CC885B-4903-4D54-9A93-00025F12DED9}" type="datetimeFigureOut">
               <a:rPr kumimoji="1" lang="ja-JP" altLang="en-US" smtClean="0"/>
-              <a:t>2024/12/4</a:t>
+              <a:t>2025/3/3</a:t>
             </a:fld>
             <a:endParaRPr kumimoji="1" lang="ja-JP" altLang="en-US"/>
           </a:p>
@@ -2297,7 +2297,7 @@
           <a:p>
             <a:fld id="{E9CC885B-4903-4D54-9A93-00025F12DED9}" type="datetimeFigureOut">
               <a:rPr kumimoji="1" lang="ja-JP" altLang="en-US" smtClean="0"/>
-              <a:t>2024/12/4</a:t>
+              <a:t>2025/3/3</a:t>
             </a:fld>
             <a:endParaRPr kumimoji="1" lang="ja-JP" altLang="en-US"/>
           </a:p>
@@ -2640,7 +2640,7 @@
           <a:p>
             <a:fld id="{E9CC885B-4903-4D54-9A93-00025F12DED9}" type="datetimeFigureOut">
               <a:rPr kumimoji="1" lang="ja-JP" altLang="en-US" smtClean="0"/>
-              <a:t>2024/12/4</a:t>
+              <a:t>2025/3/3</a:t>
             </a:fld>
             <a:endParaRPr kumimoji="1" lang="ja-JP" altLang="en-US"/>
           </a:p>
@@ -2928,7 +2928,7 @@
           <a:p>
             <a:fld id="{E9CC885B-4903-4D54-9A93-00025F12DED9}" type="datetimeFigureOut">
               <a:rPr kumimoji="1" lang="ja-JP" altLang="en-US" smtClean="0"/>
-              <a:t>2024/12/4</a:t>
+              <a:t>2025/3/3</a:t>
             </a:fld>
             <a:endParaRPr kumimoji="1" lang="ja-JP" altLang="en-US"/>
           </a:p>
@@ -3201,7 +3201,7 @@
           <a:p>
             <a:fld id="{E9CC885B-4903-4D54-9A93-00025F12DED9}" type="datetimeFigureOut">
               <a:rPr kumimoji="1" lang="ja-JP" altLang="en-US" smtClean="0"/>
-              <a:t>2024/12/4</a:t>
+              <a:t>2025/3/3</a:t>
             </a:fld>
             <a:endParaRPr kumimoji="1" lang="ja-JP" altLang="en-US"/>
           </a:p>
@@ -3668,7 +3668,7 @@
         <p:spPr>
           <a:xfrm>
             <a:off x="567542" y="1216429"/>
-            <a:ext cx="11264622" cy="3416320"/>
+            <a:ext cx="11880175" cy="3416320"/>
           </a:xfrm>
           <a:prstGeom prst="rect">
             <a:avLst/>
@@ -3715,7 +3715,7 @@
           <a:p>
             <a:r>
               <a:rPr lang="ja-JP" altLang="en-US" sz="2400" dirty="0"/>
-              <a:t>プレイヤーだけ移動して、エネミーの移動がまだのときに当たり判定をとると、</a:t>
+              <a:t>プレイヤーだけ移動して、エネミーが移動していないときに当たり判定をとると、</a:t>
             </a:r>
             <a:endParaRPr lang="en-US" altLang="ja-JP" sz="2400" dirty="0"/>
           </a:p>
